--- a/03-build/pptx/C4_U8_docente.pptx
+++ b/03-build/pptx/C4_U8_docente.pptx
@@ -4990,7 +4990,6 @@
               <a:srgbClr val="E4E3DE"/>
             </a:solidFill>
           </a:ln>
-          <a:effectLst/>
           <a:effectLst>
             <a:outerShdw blurRad="90000" dist="38000" dir="5400000" rotWithShape="0">
               <a:srgbClr val="20242E">
@@ -6362,7 +6361,6 @@
               <a:srgbClr val="D64550"/>
             </a:solidFill>
           </a:ln>
-          <a:effectLst/>
           <a:effectLst>
             <a:outerShdw blurRad="90000" dist="38000" dir="5400000" rotWithShape="0">
               <a:srgbClr val="20242E">
@@ -6550,7 +6548,6 @@
               <a:srgbClr val="E4E3DE"/>
             </a:solidFill>
           </a:ln>
-          <a:effectLst/>
           <a:effectLst>
             <a:outerShdw blurRad="90000" dist="38000" dir="5400000" rotWithShape="0">
               <a:srgbClr val="20242E">
@@ -7297,7 +7294,6 @@
               <a:srgbClr val="E4E3DE"/>
             </a:solidFill>
           </a:ln>
-          <a:effectLst/>
           <a:effectLst>
             <a:outerShdw blurRad="90000" dist="38000" dir="5400000" rotWithShape="0">
               <a:srgbClr val="20242E">
@@ -7441,7 +7437,6 @@
               <a:srgbClr val="E4E3DE"/>
             </a:solidFill>
           </a:ln>
-          <a:effectLst/>
           <a:effectLst>
             <a:outerShdw blurRad="90000" dist="38000" dir="5400000" rotWithShape="0">
               <a:srgbClr val="20242E">
@@ -7585,7 +7580,6 @@
               <a:srgbClr val="E4E3DE"/>
             </a:solidFill>
           </a:ln>
-          <a:effectLst/>
           <a:effectLst>
             <a:outerShdw blurRad="90000" dist="38000" dir="5400000" rotWithShape="0">
               <a:srgbClr val="20242E">
@@ -7729,7 +7723,6 @@
               <a:srgbClr val="E4E3DE"/>
             </a:solidFill>
           </a:ln>
-          <a:effectLst/>
           <a:effectLst>
             <a:outerShdw blurRad="90000" dist="38000" dir="5400000" rotWithShape="0">
               <a:srgbClr val="20242E">
@@ -7873,7 +7866,6 @@
               <a:srgbClr val="E4E3DE"/>
             </a:solidFill>
           </a:ln>
-          <a:effectLst/>
           <a:effectLst>
             <a:outerShdw blurRad="90000" dist="38000" dir="5400000" rotWithShape="0">
               <a:srgbClr val="20242E">
@@ -8017,7 +8009,6 @@
               <a:srgbClr val="E4E3DE"/>
             </a:solidFill>
           </a:ln>
-          <a:effectLst/>
           <a:effectLst>
             <a:outerShdw blurRad="90000" dist="38000" dir="5400000" rotWithShape="0">
               <a:srgbClr val="20242E">
@@ -8161,7 +8152,6 @@
               <a:srgbClr val="D64550"/>
             </a:solidFill>
           </a:ln>
-          <a:effectLst/>
           <a:effectLst>
             <a:outerShdw blurRad="90000" dist="38000" dir="5400000" rotWithShape="0">
               <a:srgbClr val="20242E">
@@ -8892,7 +8882,6 @@
               <a:srgbClr val="D64550"/>
             </a:solidFill>
           </a:ln>
-          <a:effectLst/>
           <a:effectLst>
             <a:outerShdw blurRad="90000" dist="38000" dir="5400000" rotWithShape="0">
               <a:srgbClr val="20242E">
@@ -10156,7 +10145,6 @@
               <a:srgbClr val="D64550"/>
             </a:solidFill>
           </a:ln>
-          <a:effectLst/>
           <a:effectLst>
             <a:outerShdw blurRad="90000" dist="38000" dir="5400000" rotWithShape="0">
               <a:srgbClr val="20242E">
@@ -10398,7 +10386,6 @@
               <a:srgbClr val="E4E3DE"/>
             </a:solidFill>
           </a:ln>
-          <a:effectLst/>
           <a:effectLst>
             <a:outerShdw blurRad="90000" dist="38000" dir="5400000" rotWithShape="0">
               <a:srgbClr val="20242E">
@@ -11101,7 +11088,6 @@
               <a:srgbClr val="E4E3DE"/>
             </a:solidFill>
           </a:ln>
-          <a:effectLst/>
           <a:effectLst>
             <a:outerShdw blurRad="90000" dist="38000" dir="5400000" rotWithShape="0">
               <a:srgbClr val="20242E">
@@ -11255,7 +11241,6 @@
               <a:srgbClr val="E4E3DE"/>
             </a:solidFill>
           </a:ln>
-          <a:effectLst/>
           <a:effectLst>
             <a:outerShdw blurRad="90000" dist="38000" dir="5400000" rotWithShape="0">
               <a:srgbClr val="20242E">
@@ -11409,7 +11394,6 @@
               <a:srgbClr val="E4E3DE"/>
             </a:solidFill>
           </a:ln>
-          <a:effectLst/>
           <a:effectLst>
             <a:outerShdw blurRad="90000" dist="38000" dir="5400000" rotWithShape="0">
               <a:srgbClr val="20242E">
@@ -11563,7 +11547,6 @@
               <a:srgbClr val="E4E3DE"/>
             </a:solidFill>
           </a:ln>
-          <a:effectLst/>
           <a:effectLst>
             <a:outerShdw blurRad="90000" dist="38000" dir="5400000" rotWithShape="0">
               <a:srgbClr val="20242E">
@@ -11717,7 +11700,6 @@
               <a:srgbClr val="E4E3DE"/>
             </a:solidFill>
           </a:ln>
-          <a:effectLst/>
           <a:effectLst>
             <a:outerShdw blurRad="90000" dist="38000" dir="5400000" rotWithShape="0">
               <a:srgbClr val="20242E">
@@ -11871,7 +11853,6 @@
               <a:srgbClr val="E4E3DE"/>
             </a:solidFill>
           </a:ln>
-          <a:effectLst/>
           <a:effectLst>
             <a:outerShdw blurRad="90000" dist="38000" dir="5400000" rotWithShape="0">
               <a:srgbClr val="20242E">
@@ -12025,7 +12006,6 @@
               <a:srgbClr val="D64550"/>
             </a:solidFill>
           </a:ln>
-          <a:effectLst/>
           <a:effectLst>
             <a:outerShdw blurRad="90000" dist="38000" dir="5400000" rotWithShape="0">
               <a:srgbClr val="20242E">
@@ -12179,7 +12159,6 @@
               <a:srgbClr val="D64550"/>
             </a:solidFill>
           </a:ln>
-          <a:effectLst/>
           <a:effectLst>
             <a:outerShdw blurRad="90000" dist="38000" dir="5400000" rotWithShape="0">
               <a:srgbClr val="20242E">
@@ -12333,7 +12312,6 @@
               <a:srgbClr val="E4E3DE"/>
             </a:solidFill>
           </a:ln>
-          <a:effectLst/>
           <a:effectLst>
             <a:outerShdw blurRad="90000" dist="38000" dir="5400000" rotWithShape="0">
               <a:srgbClr val="20242E">
@@ -12487,7 +12465,6 @@
               <a:srgbClr val="E4E3DE"/>
             </a:solidFill>
           </a:ln>
-          <a:effectLst/>
           <a:effectLst>
             <a:outerShdw blurRad="90000" dist="38000" dir="5400000" rotWithShape="0">
               <a:srgbClr val="20242E">
@@ -12641,7 +12618,6 @@
               <a:srgbClr val="E4E3DE"/>
             </a:solidFill>
           </a:ln>
-          <a:effectLst/>
           <a:effectLst>
             <a:outerShdw blurRad="90000" dist="38000" dir="5400000" rotWithShape="0">
               <a:srgbClr val="20242E">
@@ -12795,7 +12771,6 @@
               <a:srgbClr val="E4E3DE"/>
             </a:solidFill>
           </a:ln>
-          <a:effectLst/>
           <a:effectLst>
             <a:outerShdw blurRad="90000" dist="38000" dir="5400000" rotWithShape="0">
               <a:srgbClr val="20242E">
@@ -12949,7 +12924,6 @@
               <a:srgbClr val="E4E3DE"/>
             </a:solidFill>
           </a:ln>
-          <a:effectLst/>
           <a:effectLst>
             <a:outerShdw blurRad="90000" dist="38000" dir="5400000" rotWithShape="0">
               <a:srgbClr val="20242E">
@@ -13103,7 +13077,6 @@
               <a:srgbClr val="E4E3DE"/>
             </a:solidFill>
           </a:ln>
-          <a:effectLst/>
           <a:effectLst>
             <a:outerShdw blurRad="90000" dist="38000" dir="5400000" rotWithShape="0">
               <a:srgbClr val="20242E">
@@ -13257,7 +13230,6 @@
               <a:srgbClr val="E4E3DE"/>
             </a:solidFill>
           </a:ln>
-          <a:effectLst/>
           <a:effectLst>
             <a:outerShdw blurRad="90000" dist="38000" dir="5400000" rotWithShape="0">
               <a:srgbClr val="20242E">
@@ -13411,7 +13383,6 @@
               <a:srgbClr val="E4E3DE"/>
             </a:solidFill>
           </a:ln>
-          <a:effectLst/>
           <a:effectLst>
             <a:outerShdw blurRad="90000" dist="38000" dir="5400000" rotWithShape="0">
               <a:srgbClr val="20242E">
@@ -13565,7 +13536,6 @@
               <a:srgbClr val="D64550"/>
             </a:solidFill>
           </a:ln>
-          <a:effectLst/>
           <a:effectLst>
             <a:outerShdw blurRad="90000" dist="38000" dir="5400000" rotWithShape="0">
               <a:srgbClr val="20242E">
@@ -13719,7 +13689,6 @@
               <a:srgbClr val="D64550"/>
             </a:solidFill>
           </a:ln>
-          <a:effectLst/>
           <a:effectLst>
             <a:outerShdw blurRad="90000" dist="38000" dir="5400000" rotWithShape="0">
               <a:srgbClr val="20242E">
@@ -14356,7 +14325,6 @@
               <a:srgbClr val="E4E3DE"/>
             </a:solidFill>
           </a:ln>
-          <a:effectLst/>
           <a:effectLst>
             <a:outerShdw blurRad="90000" dist="38000" dir="5400000" rotWithShape="0">
               <a:srgbClr val="20242E">
@@ -14632,7 +14600,6 @@
               <a:srgbClr val="DC2626"/>
             </a:solidFill>
           </a:ln>
-          <a:effectLst/>
           <a:effectLst>
             <a:outerShdw blurRad="90000" dist="38000" dir="5400000" rotWithShape="0">
               <a:srgbClr val="20242E">
@@ -14781,7 +14748,6 @@
               <a:srgbClr val="D64550"/>
             </a:solidFill>
           </a:ln>
-          <a:effectLst/>
           <a:effectLst>
             <a:outerShdw blurRad="90000" dist="38000" dir="5400000" rotWithShape="0">
               <a:srgbClr val="20242E">
@@ -16361,7 +16327,6 @@
               <a:srgbClr val="E4E3DE"/>
             </a:solidFill>
           </a:ln>
-          <a:effectLst/>
           <a:effectLst>
             <a:outerShdw blurRad="90000" dist="38000" dir="5400000" rotWithShape="0">
               <a:srgbClr val="20242E">
@@ -16530,7 +16495,6 @@
               <a:srgbClr val="E4E3DE"/>
             </a:solidFill>
           </a:ln>
-          <a:effectLst/>
           <a:effectLst>
             <a:outerShdw blurRad="90000" dist="38000" dir="5400000" rotWithShape="0">
               <a:srgbClr val="20242E">
@@ -16699,7 +16663,6 @@
               <a:srgbClr val="E4E3DE"/>
             </a:solidFill>
           </a:ln>
-          <a:effectLst/>
           <a:effectLst>
             <a:outerShdw blurRad="90000" dist="38000" dir="5400000" rotWithShape="0">
               <a:srgbClr val="20242E">
@@ -16868,7 +16831,6 @@
               <a:srgbClr val="E4E3DE"/>
             </a:solidFill>
           </a:ln>
-          <a:effectLst/>
           <a:effectLst>
             <a:outerShdw blurRad="90000" dist="38000" dir="5400000" rotWithShape="0">
               <a:srgbClr val="20242E">
@@ -17037,7 +16999,6 @@
               <a:srgbClr val="E4E3DE"/>
             </a:solidFill>
           </a:ln>
-          <a:effectLst/>
           <a:effectLst>
             <a:outerShdw blurRad="90000" dist="38000" dir="5400000" rotWithShape="0">
               <a:srgbClr val="20242E">
@@ -17206,7 +17167,6 @@
               <a:srgbClr val="E4E3DE"/>
             </a:solidFill>
           </a:ln>
-          <a:effectLst/>
           <a:effectLst>
             <a:outerShdw blurRad="90000" dist="38000" dir="5400000" rotWithShape="0">
               <a:srgbClr val="20242E">
@@ -17375,7 +17335,6 @@
               <a:srgbClr val="E4E3DE"/>
             </a:solidFill>
           </a:ln>
-          <a:effectLst/>
           <a:effectLst>
             <a:outerShdw blurRad="90000" dist="38000" dir="5400000" rotWithShape="0">
               <a:srgbClr val="20242E">
@@ -17544,7 +17503,6 @@
               <a:srgbClr val="E4E3DE"/>
             </a:solidFill>
           </a:ln>
-          <a:effectLst/>
           <a:effectLst>
             <a:outerShdw blurRad="90000" dist="38000" dir="5400000" rotWithShape="0">
               <a:srgbClr val="20242E">
@@ -17713,7 +17671,6 @@
               <a:srgbClr val="E4E3DE"/>
             </a:solidFill>
           </a:ln>
-          <a:effectLst/>
           <a:effectLst>
             <a:outerShdw blurRad="90000" dist="38000" dir="5400000" rotWithShape="0">
               <a:srgbClr val="20242E">
@@ -17882,7 +17839,6 @@
               <a:srgbClr val="E4E3DE"/>
             </a:solidFill>
           </a:ln>
-          <a:effectLst/>
           <a:effectLst>
             <a:outerShdw blurRad="90000" dist="38000" dir="5400000" rotWithShape="0">
               <a:srgbClr val="20242E">
@@ -18631,7 +18587,6 @@
               <a:srgbClr val="E4E3DE"/>
             </a:solidFill>
           </a:ln>
-          <a:effectLst/>
           <a:effectLst>
             <a:outerShdw blurRad="90000" dist="38000" dir="5400000" rotWithShape="0">
               <a:srgbClr val="20242E">
@@ -19886,7 +19841,6 @@
               <a:srgbClr val="D64550"/>
             </a:solidFill>
           </a:ln>
-          <a:effectLst/>
           <a:effectLst>
             <a:outerShdw blurRad="90000" dist="38000" dir="5400000" rotWithShape="0">
               <a:srgbClr val="20242E">
@@ -20714,7 +20668,6 @@
               <a:srgbClr val="E4E3DE"/>
             </a:solidFill>
           </a:ln>
-          <a:effectLst/>
           <a:effectLst>
             <a:outerShdw blurRad="90000" dist="38000" dir="5400000" rotWithShape="0">
               <a:srgbClr val="20242E">
@@ -20925,7 +20878,6 @@
               <a:srgbClr val="E4E3DE"/>
             </a:solidFill>
           </a:ln>
-          <a:effectLst/>
           <a:effectLst>
             <a:outerShdw blurRad="90000" dist="38000" dir="5400000" rotWithShape="0">
               <a:srgbClr val="20242E">
@@ -21136,7 +21088,6 @@
               <a:srgbClr val="D64550"/>
             </a:solidFill>
           </a:ln>
-          <a:effectLst/>
           <a:effectLst>
             <a:outerShdw blurRad="90000" dist="38000" dir="5400000" rotWithShape="0">
               <a:srgbClr val="20242E">
@@ -22056,7 +22007,6 @@
               <a:srgbClr val="E4E3DE"/>
             </a:solidFill>
           </a:ln>
-          <a:effectLst/>
           <a:effectLst>
             <a:outerShdw blurRad="90000" dist="38000" dir="5400000" rotWithShape="0">
               <a:srgbClr val="20242E">
@@ -22501,7 +22451,6 @@
               <a:srgbClr val="E4E3DE"/>
             </a:solidFill>
           </a:ln>
-          <a:effectLst/>
           <a:effectLst>
             <a:outerShdw blurRad="90000" dist="38000" dir="5400000" rotWithShape="0">
               <a:srgbClr val="20242E">
@@ -22946,7 +22895,6 @@
               <a:srgbClr val="DC2626"/>
             </a:solidFill>
           </a:ln>
-          <a:effectLst/>
           <a:effectLst>
             <a:outerShdw blurRad="90000" dist="38000" dir="5400000" rotWithShape="0">
               <a:srgbClr val="20242E">
@@ -23446,7 +23394,6 @@
               <a:srgbClr val="E4E3DE"/>
             </a:solidFill>
           </a:ln>
-          <a:effectLst/>
           <a:effectLst>
             <a:outerShdw blurRad="90000" dist="38000" dir="5400000" rotWithShape="0">
               <a:srgbClr val="20242E">
@@ -23891,7 +23838,6 @@
               <a:srgbClr val="E4E3DE"/>
             </a:solidFill>
           </a:ln>
-          <a:effectLst/>
           <a:effectLst>
             <a:outerShdw blurRad="90000" dist="38000" dir="5400000" rotWithShape="0">
               <a:srgbClr val="20242E">
@@ -24336,7 +24282,6 @@
               <a:srgbClr val="E4E3DE"/>
             </a:solidFill>
           </a:ln>
-          <a:effectLst/>
           <a:effectLst>
             <a:outerShdw blurRad="90000" dist="38000" dir="5400000" rotWithShape="0">
               <a:srgbClr val="20242E">
@@ -24781,7 +24726,6 @@
               <a:srgbClr val="D64550"/>
             </a:solidFill>
           </a:ln>
-          <a:effectLst/>
           <a:effectLst>
             <a:outerShdw blurRad="90000" dist="38000" dir="5400000" rotWithShape="0">
               <a:srgbClr val="20242E">
@@ -26002,7 +25946,6 @@
               <a:srgbClr val="E4E3DE"/>
             </a:solidFill>
           </a:ln>
-          <a:effectLst/>
           <a:effectLst>
             <a:outerShdw blurRad="90000" dist="38000" dir="5400000" rotWithShape="0">
               <a:srgbClr val="20242E">
@@ -26426,7 +26369,6 @@
               <a:srgbClr val="E4E3DE"/>
             </a:solidFill>
           </a:ln>
-          <a:effectLst/>
           <a:effectLst>
             <a:outerShdw blurRad="90000" dist="38000" dir="5400000" rotWithShape="0">
               <a:srgbClr val="20242E">
@@ -26850,7 +26792,6 @@
               <a:srgbClr val="E4E3DE"/>
             </a:solidFill>
           </a:ln>
-          <a:effectLst/>
           <a:effectLst>
             <a:outerShdw blurRad="90000" dist="38000" dir="5400000" rotWithShape="0">
               <a:srgbClr val="20242E">
@@ -27802,7 +27743,6 @@
               <a:srgbClr val="D64550"/>
             </a:solidFill>
           </a:ln>
-          <a:effectLst/>
           <a:effectLst>
             <a:outerShdw blurRad="90000" dist="38000" dir="5400000" rotWithShape="0">
               <a:srgbClr val="20242E">
@@ -28172,7 +28112,6 @@
               <a:srgbClr val="E4E3DE"/>
             </a:solidFill>
           </a:ln>
-          <a:effectLst/>
           <a:effectLst>
             <a:outerShdw blurRad="90000" dist="38000" dir="5400000" rotWithShape="0">
               <a:srgbClr val="20242E">
@@ -29624,7 +29563,6 @@
               <a:srgbClr val="E4E3DE"/>
             </a:solidFill>
           </a:ln>
-          <a:effectLst/>
           <a:effectLst>
             <a:outerShdw blurRad="90000" dist="38000" dir="5400000" rotWithShape="0">
               <a:srgbClr val="20242E">
@@ -30372,7 +30310,6 @@
               <a:srgbClr val="DC2626"/>
             </a:solidFill>
           </a:ln>
-          <a:effectLst/>
           <a:effectLst>
             <a:outerShdw blurRad="90000" dist="38000" dir="5400000" rotWithShape="0">
               <a:srgbClr val="20242E">
@@ -31332,7 +31269,6 @@
               <a:srgbClr val="E4E3DE"/>
             </a:solidFill>
           </a:ln>
-          <a:effectLst/>
           <a:effectLst>
             <a:outerShdw blurRad="90000" dist="38000" dir="5400000" rotWithShape="0">
               <a:srgbClr val="20242E">
@@ -31693,7 +31629,6 @@
               <a:srgbClr val="D64550"/>
             </a:solidFill>
           </a:ln>
-          <a:effectLst/>
           <a:effectLst>
             <a:outerShdw blurRad="90000" dist="38000" dir="5400000" rotWithShape="0">
               <a:srgbClr val="20242E">
@@ -31972,7 +31907,6 @@
               <a:srgbClr val="D64550"/>
             </a:solidFill>
           </a:ln>
-          <a:effectLst/>
           <a:effectLst>
             <a:outerShdw blurRad="90000" dist="38000" dir="5400000" rotWithShape="0">
               <a:srgbClr val="20242E">
